--- a/pic/adoption_logos/adoption.pptx
+++ b/pic/adoption_logos/adoption.pptx
@@ -259,7 +259,7 @@
           <a:p>
             <a:fld id="{8E119A9B-EC2C-F046-AB6F-3B9C9A28D3EB}" type="datetimeFigureOut">
               <a:rPr kumimoji="1" lang="zh-CN" altLang="en-US" smtClean="0"/>
-              <a:t>2026/4/9</a:t>
+              <a:t>2026/4/20</a:t>
             </a:fld>
             <a:endParaRPr kumimoji="1" lang="zh-CN" altLang="en-US"/>
           </a:p>
@@ -457,7 +457,7 @@
           <a:p>
             <a:fld id="{8E119A9B-EC2C-F046-AB6F-3B9C9A28D3EB}" type="datetimeFigureOut">
               <a:rPr kumimoji="1" lang="zh-CN" altLang="en-US" smtClean="0"/>
-              <a:t>2026/4/9</a:t>
+              <a:t>2026/4/20</a:t>
             </a:fld>
             <a:endParaRPr kumimoji="1" lang="zh-CN" altLang="en-US"/>
           </a:p>
@@ -665,7 +665,7 @@
           <a:p>
             <a:fld id="{8E119A9B-EC2C-F046-AB6F-3B9C9A28D3EB}" type="datetimeFigureOut">
               <a:rPr kumimoji="1" lang="zh-CN" altLang="en-US" smtClean="0"/>
-              <a:t>2026/4/9</a:t>
+              <a:t>2026/4/20</a:t>
             </a:fld>
             <a:endParaRPr kumimoji="1" lang="zh-CN" altLang="en-US"/>
           </a:p>
@@ -863,7 +863,7 @@
           <a:p>
             <a:fld id="{8E119A9B-EC2C-F046-AB6F-3B9C9A28D3EB}" type="datetimeFigureOut">
               <a:rPr kumimoji="1" lang="zh-CN" altLang="en-US" smtClean="0"/>
-              <a:t>2026/4/9</a:t>
+              <a:t>2026/4/20</a:t>
             </a:fld>
             <a:endParaRPr kumimoji="1" lang="zh-CN" altLang="en-US"/>
           </a:p>
@@ -1138,7 +1138,7 @@
           <a:p>
             <a:fld id="{8E119A9B-EC2C-F046-AB6F-3B9C9A28D3EB}" type="datetimeFigureOut">
               <a:rPr kumimoji="1" lang="zh-CN" altLang="en-US" smtClean="0"/>
-              <a:t>2026/4/9</a:t>
+              <a:t>2026/4/20</a:t>
             </a:fld>
             <a:endParaRPr kumimoji="1" lang="zh-CN" altLang="en-US"/>
           </a:p>
@@ -1403,7 +1403,7 @@
           <a:p>
             <a:fld id="{8E119A9B-EC2C-F046-AB6F-3B9C9A28D3EB}" type="datetimeFigureOut">
               <a:rPr kumimoji="1" lang="zh-CN" altLang="en-US" smtClean="0"/>
-              <a:t>2026/4/9</a:t>
+              <a:t>2026/4/20</a:t>
             </a:fld>
             <a:endParaRPr kumimoji="1" lang="zh-CN" altLang="en-US"/>
           </a:p>
@@ -1815,7 +1815,7 @@
           <a:p>
             <a:fld id="{8E119A9B-EC2C-F046-AB6F-3B9C9A28D3EB}" type="datetimeFigureOut">
               <a:rPr kumimoji="1" lang="zh-CN" altLang="en-US" smtClean="0"/>
-              <a:t>2026/4/9</a:t>
+              <a:t>2026/4/20</a:t>
             </a:fld>
             <a:endParaRPr kumimoji="1" lang="zh-CN" altLang="en-US"/>
           </a:p>
@@ -1956,7 +1956,7 @@
           <a:p>
             <a:fld id="{8E119A9B-EC2C-F046-AB6F-3B9C9A28D3EB}" type="datetimeFigureOut">
               <a:rPr kumimoji="1" lang="zh-CN" altLang="en-US" smtClean="0"/>
-              <a:t>2026/4/9</a:t>
+              <a:t>2026/4/20</a:t>
             </a:fld>
             <a:endParaRPr kumimoji="1" lang="zh-CN" altLang="en-US"/>
           </a:p>
@@ -2069,7 +2069,7 @@
           <a:p>
             <a:fld id="{8E119A9B-EC2C-F046-AB6F-3B9C9A28D3EB}" type="datetimeFigureOut">
               <a:rPr kumimoji="1" lang="zh-CN" altLang="en-US" smtClean="0"/>
-              <a:t>2026/4/9</a:t>
+              <a:t>2026/4/20</a:t>
             </a:fld>
             <a:endParaRPr kumimoji="1" lang="zh-CN" altLang="en-US"/>
           </a:p>
@@ -2380,7 +2380,7 @@
           <a:p>
             <a:fld id="{8E119A9B-EC2C-F046-AB6F-3B9C9A28D3EB}" type="datetimeFigureOut">
               <a:rPr kumimoji="1" lang="zh-CN" altLang="en-US" smtClean="0"/>
-              <a:t>2026/4/9</a:t>
+              <a:t>2026/4/20</a:t>
             </a:fld>
             <a:endParaRPr kumimoji="1" lang="zh-CN" altLang="en-US"/>
           </a:p>
@@ -2668,7 +2668,7 @@
           <a:p>
             <a:fld id="{8E119A9B-EC2C-F046-AB6F-3B9C9A28D3EB}" type="datetimeFigureOut">
               <a:rPr kumimoji="1" lang="zh-CN" altLang="en-US" smtClean="0"/>
-              <a:t>2026/4/9</a:t>
+              <a:t>2026/4/20</a:t>
             </a:fld>
             <a:endParaRPr kumimoji="1" lang="zh-CN" altLang="en-US"/>
           </a:p>
@@ -2909,7 +2909,7 @@
           <a:p>
             <a:fld id="{8E119A9B-EC2C-F046-AB6F-3B9C9A28D3EB}" type="datetimeFigureOut">
               <a:rPr kumimoji="1" lang="zh-CN" altLang="en-US" smtClean="0"/>
-              <a:t>2026/4/9</a:t>
+              <a:t>2026/4/20</a:t>
             </a:fld>
             <a:endParaRPr kumimoji="1" lang="zh-CN" altLang="en-US"/>
           </a:p>
@@ -3583,6 +3583,36 @@
           </a:prstGeom>
         </p:spPr>
       </p:pic>
+      <p:pic>
+        <p:nvPicPr>
+          <p:cNvPr id="11" name="图片 10">
+            <a:extLst>
+              <a:ext uri="{FF2B5EF4-FFF2-40B4-BE49-F238E27FC236}">
+                <a16:creationId xmlns:a16="http://schemas.microsoft.com/office/drawing/2014/main" id="{3F5F10CC-841A-A4AB-F381-D9ECD445F9C8}"/>
+              </a:ext>
+            </a:extLst>
+          </p:cNvPr>
+          <p:cNvPicPr>
+            <a:picLocks noChangeAspect="1"/>
+          </p:cNvPicPr>
+          <p:nvPr/>
+        </p:nvPicPr>
+        <p:blipFill>
+          <a:blip r:embed="rId10"/>
+          <a:stretch>
+            <a:fillRect/>
+          </a:stretch>
+        </p:blipFill>
+        <p:spPr>
+          <a:xfrm>
+            <a:off x="4372902" y="2147227"/>
+            <a:ext cx="1485391" cy="468000"/>
+          </a:xfrm>
+          <a:prstGeom prst="rect">
+            <a:avLst/>
+          </a:prstGeom>
+        </p:spPr>
+      </p:pic>
     </p:spTree>
     <p:extLst>
       <p:ext uri="{BB962C8B-B14F-4D97-AF65-F5344CB8AC3E}">
